--- a/Topic_C/Exam_Practice/TC-L05_Writing_Workshop_Environmental_Solutions.pptx
+++ b/Topic_C/Exam_Practice/TC-L05_Writing_Workshop_Environmental_Solutions.pptx
@@ -784,7 +784,11 @@
           <a:lstStyle/>
           <a:p>
             <a:r>
-              <a:rPr lang="en-US" dirty="0"/>
+              <a:rPr lang="ar-SA" dirty="0">
+                <a:latin typeface="Amiri" pitchFamily="2" charset="-78"/>
+                <a:ea typeface="Amiri" pitchFamily="2" charset="-78"/>
+                <a:cs typeface="Amiri" pitchFamily="2" charset="-78"/>
+              </a:rPr>
               <a:t>Q3 (3 min to choose and read). Title (أ) suits Core and Develop; title (ب) suits Stretch.</a:t>
             </a:r>
             <a:endParaRPr lang="en-US" dirty="0"/>
@@ -1403,7 +1407,11 @@
           <a:lstStyle/>
           <a:p>
             <a:r>
-              <a:rPr lang="en-US" dirty="0"/>
+              <a:rPr lang="ar-SA" dirty="0">
+                <a:latin typeface="Amiri" pitchFamily="2" charset="-78"/>
+                <a:ea typeface="Amiri" pitchFamily="2" charset="-78"/>
+                <a:cs typeface="Amiri" pitchFamily="2" charset="-78"/>
+              </a:rPr>
               <a:t>WELCOME (1 min) — while students join.
 • Greet each student by name as they arrive: السَّلَامُ عَلَيْكُمْ. Take the register (Pastoral Tracker: attendance 0/1).
 • 2-MINUTE CHECK-IN (SEND training): a private chat to any student who seemed unsettled last lesson — “Are you okay today? 👍 / 👎”.
@@ -1936,7 +1944,11 @@
           <a:lstStyle/>
           <a:p>
             <a:r>
-              <a:rPr lang="en-US" dirty="0"/>
+              <a:rPr lang="ar-SA" dirty="0">
+                <a:latin typeface="Amiri" pitchFamily="2" charset="-78"/>
+                <a:ea typeface="Amiri" pitchFamily="2" charset="-78"/>
+                <a:cs typeface="Amiri" pitchFamily="2" charset="-78"/>
+              </a:rPr>
               <a:t>Question words: مَا (what) · يَنْبَغِي (should) · فَعَلَتْ (did — PAST) · سَتُنَظِّمُ (will organise — FUTURE) · لِمَاذَا (why).</a:t>
             </a:r>
             <a:endParaRPr lang="en-US" dirty="0"/>
@@ -2508,6 +2520,7 @@
                   <a:srgbClr val="D4AF37"/>
                 </a:solidFill>
                 <a:latin typeface="Amiri" pitchFamily="2" charset="-78"/>
+                <a:ea typeface="Amiri" pitchFamily="2" charset="-78"/>
                 <a:cs typeface="Amiri" pitchFamily="2" charset="-78"/>
               </a:rPr>
               <a:t>م</a:t>
@@ -2714,6 +2727,7 @@
                   <a:srgbClr val="D4AF37"/>
                 </a:solidFill>
                 <a:latin typeface="Amiri" pitchFamily="2" charset="-78"/>
+                <a:ea typeface="Amiri" pitchFamily="2" charset="-78"/>
                 <a:cs typeface="Amiri" pitchFamily="2" charset="-78"/>
               </a:rPr>
               <a:t>وَرْشَةُ الكِتَابَةِ — حُلُولٌ لِلْبِيئَةِ</a:t>
@@ -3171,6 +3185,7 @@
                   <a:srgbClr val="D4AF37"/>
                 </a:solidFill>
                 <a:latin typeface="Amiri" pitchFamily="2" charset="-78"/>
+                <a:ea typeface="Amiri" pitchFamily="2" charset="-78"/>
                 <a:cs typeface="Amiri" pitchFamily="2" charset="-78"/>
               </a:rPr>
               <a:t>م</a:t>
@@ -3491,6 +3506,7 @@
                   <a:srgbClr val="8A6D1E"/>
                 </a:solidFill>
                 <a:latin typeface="Amiri" pitchFamily="2" charset="-78"/>
+                <a:ea typeface="Amiri" pitchFamily="2" charset="-78"/>
                 <a:cs typeface="Amiri" pitchFamily="2" charset="-78"/>
               </a:rPr>
               <a:t>نَمُوذَجُ الإِجَابَةِ</a:t>
@@ -3604,6 +3620,7 @@
                   <a:srgbClr val="1F2A37"/>
                 </a:solidFill>
                 <a:latin typeface="Amiri" pitchFamily="2" charset="-78"/>
+                <a:ea typeface="Amiri" pitchFamily="2" charset="-78"/>
                 <a:cs typeface="Amiri" pitchFamily="2" charset="-78"/>
               </a:rPr>
               <a:t>إِلَى مُحَرِّرِ مَجَلَّةِ المَدْرَسَةِ،</a:t>
@@ -3623,6 +3640,7 @@
                   <a:srgbClr val="1F2A37"/>
                 </a:solidFill>
                 <a:latin typeface="Amiri" pitchFamily="2" charset="-78"/>
+                <a:ea typeface="Amiri" pitchFamily="2" charset="-78"/>
                 <a:cs typeface="Amiri" pitchFamily="2" charset="-78"/>
               </a:rPr>
               <a:t>أُرِيدُ أَنْ أُشَارِكَ أَفْكَارِي عَنْ حِمَايَةِ البِيئَةِ. أَكْبَرُ مُشْكِلَةٍ فِي مَدْرَسَتِنَا هِيَ الوَرَقُ وَالبْلَاسْتِيكُ؛ نَرْمِي كَمِّيَّاتٍ كَبِيرَةً كُلَّ يَوْمٍ. فِي رَأْيِي، يَنْبَغِي أَنْ نَضَعَ سَلَّاتٍ لِإِعَادَةِ التَّدْوِيرِ فِي كُلِّ صَفٍّ، وَيَجِبُ عَلَى الطُّلَّابِ أَنْ يَحْمِلُوا زُجَاجَاتِ مَاءٍ خَاصَّةً. فِي السَّنَةِ المَاضِيَةِ زَرَعْنَا عِشْرِينَ شَجَرَةً فِي المَلْعَبِ، وَكَانَتْ تَجْرِبَةً رَائِعَةً. فِي الشَّهْرِ القَادِمِ سَنُنَظِّمُ حَمْلَةَ تَوْعِيَةٍ، لِكَيْ يَعْرِفَ الجَمِيعُ أَهَمِّيَّةَ البِيئَةِ.</a:t>
@@ -3642,6 +3660,7 @@
                   <a:srgbClr val="1F2A37"/>
                 </a:solidFill>
                 <a:latin typeface="Amiri" pitchFamily="2" charset="-78"/>
+                <a:ea typeface="Amiri" pitchFamily="2" charset="-78"/>
                 <a:cs typeface="Amiri" pitchFamily="2" charset="-78"/>
               </a:rPr>
               <a:t>مَعَ الشُّكْرِ،</a:t>
@@ -3661,6 +3680,7 @@
                   <a:srgbClr val="1F2A37"/>
                 </a:solidFill>
                 <a:latin typeface="Amiri" pitchFamily="2" charset="-78"/>
+                <a:ea typeface="Amiri" pitchFamily="2" charset="-78"/>
                 <a:cs typeface="Amiri" pitchFamily="2" charset="-78"/>
               </a:rPr>
               <a:t>آدَمُ</a:t>
@@ -3824,11 +3844,12 @@
               <a:buNone/>
             </a:pPr>
             <a:r>
-              <a:rPr lang="en-US" sz="950" b="1" dirty="0">
+              <a:rPr lang="ar-SA" sz="950" b="1" dirty="0">
                 <a:solidFill>
                   <a:srgbClr val="FFFFFF"/>
                 </a:solidFill>
                 <a:latin typeface="Calibri" pitchFamily="34" charset="0"/>
+                <a:ea typeface="Amiri" pitchFamily="2" charset="-78"/>
                 <a:cs typeface="Amiri" pitchFamily="2" charset="-78"/>
               </a:rPr>
               <a:t>أَكْبَرُ مُشْكِلَةٍ</a:t>
@@ -3889,11 +3910,12 @@
               <a:buNone/>
             </a:pPr>
             <a:r>
-              <a:rPr lang="en-US" sz="950" b="1" dirty="0">
+              <a:rPr lang="ar-SA" sz="950" b="1" dirty="0">
                 <a:solidFill>
                   <a:srgbClr val="FFFFFF"/>
                 </a:solidFill>
                 <a:latin typeface="Calibri" pitchFamily="34" charset="0"/>
+                <a:ea typeface="Amiri" pitchFamily="2" charset="-78"/>
                 <a:cs typeface="Amiri" pitchFamily="2" charset="-78"/>
               </a:rPr>
               <a:t>يَنْبَغِي أَنْ نَضَعَ</a:t>
@@ -3954,11 +3976,12 @@
               <a:buNone/>
             </a:pPr>
             <a:r>
-              <a:rPr lang="en-US" sz="950" b="1" dirty="0">
+              <a:rPr lang="ar-SA" sz="950" b="1" dirty="0">
                 <a:solidFill>
                   <a:srgbClr val="FFFFFF"/>
                 </a:solidFill>
                 <a:latin typeface="Calibri" pitchFamily="34" charset="0"/>
+                <a:ea typeface="Amiri" pitchFamily="2" charset="-78"/>
                 <a:cs typeface="Amiri" pitchFamily="2" charset="-78"/>
               </a:rPr>
               <a:t>يَجِبُ عَلَى الطُّلَّابِ أَنْ</a:t>
@@ -4019,11 +4042,12 @@
               <a:buNone/>
             </a:pPr>
             <a:r>
-              <a:rPr lang="en-US" sz="950" b="1" dirty="0">
+              <a:rPr lang="ar-SA" sz="950" b="1" dirty="0">
                 <a:solidFill>
                   <a:srgbClr val="FFFFFF"/>
                 </a:solidFill>
                 <a:latin typeface="Calibri" pitchFamily="34" charset="0"/>
+                <a:ea typeface="Amiri" pitchFamily="2" charset="-78"/>
                 <a:cs typeface="Amiri" pitchFamily="2" charset="-78"/>
               </a:rPr>
               <a:t>لِكَيْ يَعْرِفَ</a:t>
@@ -4157,6 +4181,7 @@
                   <a:srgbClr val="D4AF37"/>
                 </a:solidFill>
                 <a:latin typeface="Amiri" pitchFamily="2" charset="-78"/>
+                <a:ea typeface="Amiri" pitchFamily="2" charset="-78"/>
                 <a:cs typeface="Amiri" pitchFamily="2" charset="-78"/>
               </a:rPr>
               <a:t>م</a:t>
@@ -4477,6 +4502,7 @@
                   <a:srgbClr val="8A6D1E"/>
                 </a:solidFill>
                 <a:latin typeface="Amiri" pitchFamily="2" charset="-78"/>
+                <a:ea typeface="Amiri" pitchFamily="2" charset="-78"/>
                 <a:cs typeface="Amiri" pitchFamily="2" charset="-78"/>
               </a:rPr>
               <a:t>نَمُوذَجُ الإِجَابَةِ</a:t>
@@ -4590,6 +4616,7 @@
                   <a:srgbClr val="1F2A37"/>
                 </a:solidFill>
                 <a:latin typeface="Amiri" pitchFamily="2" charset="-78"/>
+                <a:ea typeface="Amiri" pitchFamily="2" charset="-78"/>
                 <a:cs typeface="Amiri" pitchFamily="2" charset="-78"/>
               </a:rPr>
               <a:t>إِلَى مُحَرِّرِ مَجَلَّةِ المَدْرَسَةِ المُحْتَرَمِ،</a:t>
@@ -4609,6 +4636,7 @@
                   <a:srgbClr val="1F2A37"/>
                 </a:solidFill>
                 <a:latin typeface="Amiri" pitchFamily="2" charset="-78"/>
+                <a:ea typeface="Amiri" pitchFamily="2" charset="-78"/>
                 <a:cs typeface="Amiri" pitchFamily="2" charset="-78"/>
               </a:rPr>
               <a:t>أَكْتُبُ إِلَيْكُمْ لِأَنِّي أُؤْمِنُ بِأَنَّ مَدْرَسَتَنَا تَسْتَطِيعُ أَنْ تَكُونَ قُدْوَةً فِي حِمَايَةِ البِيئَةِ. فَمَا زِلْنَا نَرْمِي يَوْمِيًّا أَكْيَاسًا مِنَ الأَوْرَاقِ وَالزُّجَاجَاتِ الَّتِي يُمْكِنُ إِعَادَةُ تَدْوِيرِهَا. لِذٰلِكَ أَقْتَرِحُ أَنْ تُوضَعَ سَلَّاتٌ مُلَوَّنَةٌ لِلْفَرْزِ فِي كُلِّ مَمَرٍّ، كَمَا يَجِبُ عَلَى المَقْصَفِ أَنْ يَتَوَقَّفَ عَنْ بَيْعِ الأَكْوَابِ البْلَاسْتِيكِيَّةِ. وَقَدْ أَثْبَتَتْ تَجْرِبَتُنَا العَامَ المَاضِي، حِينَ زَرَعْنَا عِشْرِينَ شَجَرَةً، أَنَّ الطُّلَّابَ مُتَحَمِّسُونَ لِلتَّغْيِيرِ. وَإِذَا دَعَمَتِ الإِدَارَةُ فِكْرَتَنَا، فَسَنُطْلِقُ الشَّهْرَ القَادِمَ حَمْلَةً بِعُنْوَانِ "مَدْرَسَةٌ بِلَا بْلَاسْتِيكٍ".</a:t>
@@ -4628,6 +4656,7 @@
                   <a:srgbClr val="1F2A37"/>
                 </a:solidFill>
                 <a:latin typeface="Amiri" pitchFamily="2" charset="-78"/>
+                <a:ea typeface="Amiri" pitchFamily="2" charset="-78"/>
                 <a:cs typeface="Amiri" pitchFamily="2" charset="-78"/>
               </a:rPr>
               <a:t>وَتَفَضَّلُوا بِقَبُولِ فَائِقِ الاحْتِرَامِ،</a:t>
@@ -4647,6 +4676,7 @@
                   <a:srgbClr val="1F2A37"/>
                 </a:solidFill>
                 <a:latin typeface="Amiri" pitchFamily="2" charset="-78"/>
+                <a:ea typeface="Amiri" pitchFamily="2" charset="-78"/>
                 <a:cs typeface="Amiri" pitchFamily="2" charset="-78"/>
               </a:rPr>
               <a:t>آدَمُ</a:t>
@@ -4810,11 +4840,12 @@
               <a:buNone/>
             </a:pPr>
             <a:r>
-              <a:rPr lang="en-US" sz="950" b="1" dirty="0">
+              <a:rPr lang="ar-SA" sz="950" b="1" dirty="0">
                 <a:solidFill>
                   <a:srgbClr val="FFFFFF"/>
                 </a:solidFill>
                 <a:latin typeface="Calibri" pitchFamily="34" charset="0"/>
+                <a:ea typeface="Amiri" pitchFamily="2" charset="-78"/>
                 <a:cs typeface="Amiri" pitchFamily="2" charset="-78"/>
               </a:rPr>
               <a:t>أُؤْمِنُ بِأَنَّ</a:t>
@@ -4875,11 +4906,12 @@
               <a:buNone/>
             </a:pPr>
             <a:r>
-              <a:rPr lang="en-US" sz="950" b="1" dirty="0">
+              <a:rPr lang="ar-SA" sz="950" b="1" dirty="0">
                 <a:solidFill>
                   <a:srgbClr val="FFFFFF"/>
                 </a:solidFill>
                 <a:latin typeface="Calibri" pitchFamily="34" charset="0"/>
+                <a:ea typeface="Amiri" pitchFamily="2" charset="-78"/>
                 <a:cs typeface="Amiri" pitchFamily="2" charset="-78"/>
               </a:rPr>
               <a:t>أَقْتَرِحُ أَنْ تُوضَعَ</a:t>
@@ -4940,11 +4972,12 @@
               <a:buNone/>
             </a:pPr>
             <a:r>
-              <a:rPr lang="en-US" sz="950" b="1" dirty="0">
+              <a:rPr lang="ar-SA" sz="950" b="1" dirty="0">
                 <a:solidFill>
                   <a:srgbClr val="FFFFFF"/>
                 </a:solidFill>
                 <a:latin typeface="Calibri" pitchFamily="34" charset="0"/>
+                <a:ea typeface="Amiri" pitchFamily="2" charset="-78"/>
                 <a:cs typeface="Amiri" pitchFamily="2" charset="-78"/>
               </a:rPr>
               <a:t>يَجِبُ عَلَى المَقْصَفِ أَنْ</a:t>
@@ -5005,11 +5038,12 @@
               <a:buNone/>
             </a:pPr>
             <a:r>
-              <a:rPr lang="en-US" sz="950" b="1" dirty="0">
+              <a:rPr lang="ar-SA" sz="950" b="1" dirty="0">
                 <a:solidFill>
                   <a:srgbClr val="FFFFFF"/>
                 </a:solidFill>
                 <a:latin typeface="Calibri" pitchFamily="34" charset="0"/>
+                <a:ea typeface="Amiri" pitchFamily="2" charset="-78"/>
                 <a:cs typeface="Amiri" pitchFamily="2" charset="-78"/>
               </a:rPr>
               <a:t>إِذَا دَعَمَتْ … فَسَنُطْلِقُ</a:t>
@@ -5143,6 +5177,7 @@
                   <a:srgbClr val="D4AF37"/>
                 </a:solidFill>
                 <a:latin typeface="Amiri" pitchFamily="2" charset="-78"/>
+                <a:ea typeface="Amiri" pitchFamily="2" charset="-78"/>
                 <a:cs typeface="Amiri" pitchFamily="2" charset="-78"/>
               </a:rPr>
               <a:t>م</a:t>
@@ -5463,6 +5498,7 @@
                   <a:srgbClr val="8A6D1E"/>
                 </a:solidFill>
                 <a:latin typeface="Amiri" pitchFamily="2" charset="-78"/>
+                <a:ea typeface="Amiri" pitchFamily="2" charset="-78"/>
                 <a:cs typeface="Amiri" pitchFamily="2" charset="-78"/>
               </a:rPr>
               <a:t>اخْتَرْ عُنْوَانًا وَاحِدًا</a:t>
@@ -5743,6 +5779,7 @@
                   <a:srgbClr val="1B3B6F"/>
                 </a:solidFill>
                 <a:latin typeface="Amiri" pitchFamily="2" charset="-78"/>
+                <a:ea typeface="Amiri" pitchFamily="2" charset="-78"/>
                 <a:cs typeface="Amiri" pitchFamily="2" charset="-78"/>
               </a:rPr>
               <a:t>مَاذَا أَفْعَلُ لِأَحْمِيَ البِيئَةَ؟</a:t>
@@ -5781,6 +5818,7 @@
                   <a:srgbClr val="1B3B6F"/>
                 </a:solidFill>
                 <a:latin typeface="Amiri" pitchFamily="2" charset="-78"/>
+                <a:ea typeface="Amiri" pitchFamily="2" charset="-78"/>
                 <a:cs typeface="Amiri" pitchFamily="2" charset="-78"/>
               </a:rPr>
               <a:t>(أ)</a:t>
@@ -5884,6 +5922,7 @@
                   <a:srgbClr val="1B3B6F"/>
                 </a:solidFill>
                 <a:latin typeface="Amiri" pitchFamily="2" charset="-78"/>
+                <a:ea typeface="Amiri" pitchFamily="2" charset="-78"/>
                 <a:cs typeface="Amiri" pitchFamily="2" charset="-78"/>
               </a:rPr>
               <a:t>فِي البَيْتِ · فِي المَدْرَسَةِ · حَمْلَةٌ أَوْ مَشْرُوعٌ شَارَكْتَ فِيهِ · رَأْيُكَ وَخِطَطُكَ</a:t>
@@ -6015,6 +6054,7 @@
                   <a:srgbClr val="1B3B6F"/>
                 </a:solidFill>
                 <a:latin typeface="Amiri" pitchFamily="2" charset="-78"/>
+                <a:ea typeface="Amiri" pitchFamily="2" charset="-78"/>
                 <a:cs typeface="Amiri" pitchFamily="2" charset="-78"/>
               </a:rPr>
               <a:t>حِمَايَةُ البِيئَةِ: مَسْؤُولِيَّةُ الحُكُومَاتِ أَمِ الأَفْرَادِ؟</a:t>
@@ -6053,6 +6093,7 @@
                   <a:srgbClr val="1B3B6F"/>
                 </a:solidFill>
                 <a:latin typeface="Amiri" pitchFamily="2" charset="-78"/>
+                <a:ea typeface="Amiri" pitchFamily="2" charset="-78"/>
                 <a:cs typeface="Amiri" pitchFamily="2" charset="-78"/>
               </a:rPr>
               <a:t>(ب)</a:t>
@@ -6156,6 +6197,7 @@
                   <a:srgbClr val="1B3B6F"/>
                 </a:solidFill>
                 <a:latin typeface="Amiri" pitchFamily="2" charset="-78"/>
+                <a:ea typeface="Amiri" pitchFamily="2" charset="-78"/>
                 <a:cs typeface="Amiri" pitchFamily="2" charset="-78"/>
               </a:rPr>
               <a:t>المُشْكِلَةُ · دَوْرُ الحُكُومَاتِ وَدَوْرُ الأَفْرَادِ · مِثَالٌ رَأَيْتَهُ · رَأْيُكَ</a:t>
@@ -6355,6 +6397,7 @@
                   <a:srgbClr val="D4AF37"/>
                 </a:solidFill>
                 <a:latin typeface="Amiri" pitchFamily="2" charset="-78"/>
+                <a:ea typeface="Amiri" pitchFamily="2" charset="-78"/>
                 <a:cs typeface="Amiri" pitchFamily="2" charset="-78"/>
               </a:rPr>
               <a:t>م</a:t>
@@ -6675,6 +6718,7 @@
                   <a:srgbClr val="8A6D1E"/>
                 </a:solidFill>
                 <a:latin typeface="Amiri" pitchFamily="2" charset="-78"/>
+                <a:ea typeface="Amiri" pitchFamily="2" charset="-78"/>
                 <a:cs typeface="Amiri" pitchFamily="2" charset="-78"/>
               </a:rPr>
               <a:t>خُطَّةُ الكِتَابَةِ</a:t>
@@ -7299,6 +7343,7 @@
                   <a:srgbClr val="1B3B6F"/>
                 </a:solidFill>
                 <a:latin typeface="Amiri" pitchFamily="2" charset="-78"/>
+                <a:ea typeface="Amiri" pitchFamily="2" charset="-78"/>
                 <a:cs typeface="Amiri" pitchFamily="2" charset="-78"/>
               </a:rPr>
               <a:t>نُعِيدُ تَدْوِيرَ الوَرَقِ، لِكَيْ نُقَلِّلَ النُّفَايَاتِ.</a:t>
@@ -7398,6 +7443,7 @@
                   <a:srgbClr val="1B3B6F"/>
                 </a:solidFill>
                 <a:latin typeface="Amiri" pitchFamily="2" charset="-78"/>
+                <a:ea typeface="Amiri" pitchFamily="2" charset="-78"/>
                 <a:cs typeface="Amiri" pitchFamily="2" charset="-78"/>
               </a:rPr>
               <a:t>شَارَكْتُ فِي حَمْلَةٍ، وَزَرَعْنَا خَمْسِينَ شَجَرَةً.</a:t>
@@ -7497,6 +7543,7 @@
                   <a:srgbClr val="1B3B6F"/>
                 </a:solidFill>
                 <a:latin typeface="Amiri" pitchFamily="2" charset="-78"/>
+                <a:ea typeface="Amiri" pitchFamily="2" charset="-78"/>
                 <a:cs typeface="Amiri" pitchFamily="2" charset="-78"/>
               </a:rPr>
               <a:t>سَأُرَكِّبُ أَلْوَاحًا شَمْسِيَّةً عَلَى بَيْتِي.</a:t>
@@ -7658,6 +7705,7 @@
                   <a:srgbClr val="1F2A37"/>
                 </a:solidFill>
                 <a:latin typeface="Amiri" pitchFamily="2" charset="-78"/>
+                <a:ea typeface="Amiri" pitchFamily="2" charset="-78"/>
                 <a:cs typeface="Amiri" pitchFamily="2" charset="-78"/>
               </a:rPr>
               <a:t>أ</a:t>
@@ -7684,6 +7732,7 @@
                   <a:srgbClr val="1F2A37"/>
                 </a:solidFill>
                 <a:latin typeface="Amiri" pitchFamily="2" charset="-78"/>
+                <a:ea typeface="Amiri" pitchFamily="2" charset="-78"/>
                 <a:cs typeface="Amiri" pitchFamily="2" charset="-78"/>
               </a:rPr>
               <a:t>ب</a:t>
@@ -7830,6 +7879,7 @@
                   <a:srgbClr val="D4AF37"/>
                 </a:solidFill>
                 <a:latin typeface="Amiri" pitchFamily="2" charset="-78"/>
+                <a:ea typeface="Amiri" pitchFamily="2" charset="-78"/>
                 <a:cs typeface="Amiri" pitchFamily="2" charset="-78"/>
               </a:rPr>
               <a:t>م</a:t>
@@ -8087,6 +8137,7 @@
                   <a:srgbClr val="8A6D1E"/>
                 </a:solidFill>
                 <a:latin typeface="Amiri" pitchFamily="2" charset="-78"/>
+                <a:ea typeface="Amiri" pitchFamily="2" charset="-78"/>
                 <a:cs typeface="Amiri" pitchFamily="2" charset="-78"/>
               </a:rPr>
               <a:t>أ</a:t>
@@ -8151,6 +8202,7 @@
                   <a:srgbClr val="1B3B6F"/>
                 </a:solidFill>
                 <a:latin typeface="Amiri" pitchFamily="2" charset="-78"/>
+                <a:ea typeface="Amiri" pitchFamily="2" charset="-78"/>
                 <a:cs typeface="Amiri" pitchFamily="2" charset="-78"/>
               </a:rPr>
               <a:t>أ</a:t>
@@ -8202,6 +8254,7 @@
                   <a:srgbClr val="8A6D1E"/>
                 </a:solidFill>
                 <a:latin typeface="Amiri" pitchFamily="2" charset="-78"/>
+                <a:ea typeface="Amiri" pitchFamily="2" charset="-78"/>
                 <a:cs typeface="Amiri" pitchFamily="2" charset="-78"/>
               </a:rPr>
               <a:t>نَمُوذَجُ الإِجَابَةِ</a:t>
@@ -8315,6 +8368,7 @@
                   <a:srgbClr val="1F2A37"/>
                 </a:solidFill>
                 <a:latin typeface="Amiri" pitchFamily="2" charset="-78"/>
+                <a:ea typeface="Amiri" pitchFamily="2" charset="-78"/>
                 <a:cs typeface="Amiri" pitchFamily="2" charset="-78"/>
               </a:rPr>
               <a:t>أَنَا أُحِبُّ البِيئَةَ، وَأُحَاوِلُ أَنْ أَحْمِيَهَا كُلَّ يَوْمٍ. فِي البَيْتِ نُعِيدُ تَدْوِيرَ الوَرَقِ وَالبْلَاسْتِيكِ وَالزُّجَاجِ، وَأُطْفِئُ الأَضْوَاءَ عِنْدَمَا أَخْرُجُ مِنَ الغُرْفَةِ. أُغْلِقُ الحَنَفِيَّةَ أَيْضًا عِنْدَمَا أُنَظِّفُ أَسْنَانِي، لِكَيْ أُوَفِّرَ المَاءَ. وَأَحْمِلُ حَقِيبَةً مِنَ القُمَاشِ إِلَى السُّوقِ.</a:t>
@@ -8334,6 +8388,7 @@
                   <a:srgbClr val="1F2A37"/>
                 </a:solidFill>
                 <a:latin typeface="Amiri" pitchFamily="2" charset="-78"/>
+                <a:ea typeface="Amiri" pitchFamily="2" charset="-78"/>
                 <a:cs typeface="Amiri" pitchFamily="2" charset="-78"/>
               </a:rPr>
               <a:t>فِي المَدْرَسَةِ عِنْدَنَا نَادٍ لِلْبِيئَةِ. نَجْتَمِعُ كُلَّ يَوْمِ أَرْبِعَاءَ، وَنَتَكَلَّمُ عَنِ الحُلُولِ. فِي رَأْيِي، يَنْبَغِي أَنْ نَذْهَبَ إِلَى المَدْرَسَةِ مَشْيًا أَوْ بِالدَّرَّاجَةِ، لِأَنَّ السَّيَّارَاتِ تُلَوِّثُ الهَوَاءَ.</a:t>
@@ -8353,6 +8408,7 @@
                   <a:srgbClr val="1F2A37"/>
                 </a:solidFill>
                 <a:latin typeface="Amiri" pitchFamily="2" charset="-78"/>
+                <a:ea typeface="Amiri" pitchFamily="2" charset="-78"/>
                 <a:cs typeface="Amiri" pitchFamily="2" charset="-78"/>
               </a:rPr>
               <a:t>فِي السَّنَةِ المَاضِيَةِ شَارَكْتُ فِي حَمْلَةٍ لِزِرَاعَةِ الأَشْجَارِ. ذَهَبْنَا إِلَى حَدِيقَةٍ كَبِيرَةٍ، وَزَرَعْنَا خَمْسِينَ شَجَرَةً صَغِيرَةً. كَانَ العَمَلُ مُتْعِبًا، لٰكِنِّي كُنْتُ فَخُورًا جِدًّا. الآنَ أَصْبَحَتِ الأَشْجَارُ أَكْبَرَ، وَتَعِيشُ فِيهَا الطُّيُورُ.</a:t>
@@ -8372,6 +8428,7 @@
                   <a:srgbClr val="1F2A37"/>
                 </a:solidFill>
                 <a:latin typeface="Amiri" pitchFamily="2" charset="-78"/>
+                <a:ea typeface="Amiri" pitchFamily="2" charset="-78"/>
                 <a:cs typeface="Amiri" pitchFamily="2" charset="-78"/>
               </a:rPr>
               <a:t>يَجِبُ عَلَى الحُكُومَةِ أَنْ تُسَاعِدَنَا أَيْضًا. وَيَجِبُ عَلَى المَصَانِعِ أَنْ تُقَلِّلَ الدُّخَانَ. فِي المُسْتَقْبَلِ سَأُرَكِّبُ أَلْوَاحًا شَمْسِيَّةً عَلَى بَيْتِي، وَسَأَشْتَرِي سَيَّارَةً كَهْرَبَائِيَّةً، لِكَيْ أُسَاعِدَ البِيئَةَ.</a:t>
@@ -8535,11 +8592,12 @@
               <a:buNone/>
             </a:pPr>
             <a:r>
-              <a:rPr lang="en-US" sz="950" b="1" dirty="0">
+              <a:rPr lang="ar-SA" sz="950" b="1" dirty="0">
                 <a:solidFill>
                   <a:srgbClr val="FFFFFF"/>
                 </a:solidFill>
                 <a:latin typeface="Calibri" pitchFamily="34" charset="0"/>
+                <a:ea typeface="Amiri" pitchFamily="2" charset="-78"/>
                 <a:cs typeface="Amiri" pitchFamily="2" charset="-78"/>
               </a:rPr>
               <a:t>لِكَيْ أُوَفِّرَ</a:t>
@@ -8600,11 +8658,12 @@
               <a:buNone/>
             </a:pPr>
             <a:r>
-              <a:rPr lang="en-US" sz="950" b="1" dirty="0">
+              <a:rPr lang="ar-SA" sz="950" b="1" dirty="0">
                 <a:solidFill>
                   <a:srgbClr val="FFFFFF"/>
                 </a:solidFill>
                 <a:latin typeface="Calibri" pitchFamily="34" charset="0"/>
+                <a:ea typeface="Amiri" pitchFamily="2" charset="-78"/>
                 <a:cs typeface="Amiri" pitchFamily="2" charset="-78"/>
               </a:rPr>
               <a:t>يَنْبَغِي أَنْ نَذْهَبَ</a:t>
@@ -8665,11 +8724,12 @@
               <a:buNone/>
             </a:pPr>
             <a:r>
-              <a:rPr lang="en-US" sz="950" b="1" dirty="0">
+              <a:rPr lang="ar-SA" sz="950" b="1" dirty="0">
                 <a:solidFill>
                   <a:srgbClr val="FFFFFF"/>
                 </a:solidFill>
                 <a:latin typeface="Calibri" pitchFamily="34" charset="0"/>
+                <a:ea typeface="Amiri" pitchFamily="2" charset="-78"/>
                 <a:cs typeface="Amiri" pitchFamily="2" charset="-78"/>
               </a:rPr>
               <a:t>كَانَ العَمَلُ مُتْعِبًا</a:t>
@@ -8730,11 +8790,12 @@
               <a:buNone/>
             </a:pPr>
             <a:r>
-              <a:rPr lang="en-US" sz="950" b="1" dirty="0">
+              <a:rPr lang="ar-SA" sz="950" b="1" dirty="0">
                 <a:solidFill>
                   <a:srgbClr val="FFFFFF"/>
                 </a:solidFill>
                 <a:latin typeface="Calibri" pitchFamily="34" charset="0"/>
+                <a:ea typeface="Amiri" pitchFamily="2" charset="-78"/>
                 <a:cs typeface="Amiri" pitchFamily="2" charset="-78"/>
               </a:rPr>
               <a:t>يَجِبُ عَلَى الحُكُومَةِ أَنْ</a:t>
@@ -8868,6 +8929,7 @@
                   <a:srgbClr val="D4AF37"/>
                 </a:solidFill>
                 <a:latin typeface="Amiri" pitchFamily="2" charset="-78"/>
+                <a:ea typeface="Amiri" pitchFamily="2" charset="-78"/>
                 <a:cs typeface="Amiri" pitchFamily="2" charset="-78"/>
               </a:rPr>
               <a:t>م</a:t>
@@ -9125,6 +9187,7 @@
                   <a:srgbClr val="8A6D1E"/>
                 </a:solidFill>
                 <a:latin typeface="Amiri" pitchFamily="2" charset="-78"/>
+                <a:ea typeface="Amiri" pitchFamily="2" charset="-78"/>
                 <a:cs typeface="Amiri" pitchFamily="2" charset="-78"/>
               </a:rPr>
               <a:t>أ</a:t>
@@ -9189,6 +9252,7 @@
                   <a:srgbClr val="1B3B6F"/>
                 </a:solidFill>
                 <a:latin typeface="Amiri" pitchFamily="2" charset="-78"/>
+                <a:ea typeface="Amiri" pitchFamily="2" charset="-78"/>
                 <a:cs typeface="Amiri" pitchFamily="2" charset="-78"/>
               </a:rPr>
               <a:t>أ</a:t>
@@ -9240,6 +9304,7 @@
                   <a:srgbClr val="8A6D1E"/>
                 </a:solidFill>
                 <a:latin typeface="Amiri" pitchFamily="2" charset="-78"/>
+                <a:ea typeface="Amiri" pitchFamily="2" charset="-78"/>
                 <a:cs typeface="Amiri" pitchFamily="2" charset="-78"/>
               </a:rPr>
               <a:t>نَمُوذَجُ الإِجَابَةِ</a:t>
@@ -9353,6 +9418,7 @@
                   <a:srgbClr val="1F2A37"/>
                 </a:solidFill>
                 <a:latin typeface="Amiri" pitchFamily="2" charset="-78"/>
+                <a:ea typeface="Amiri" pitchFamily="2" charset="-78"/>
                 <a:cs typeface="Amiri" pitchFamily="2" charset="-78"/>
               </a:rPr>
               <a:t>كَثِيرًا مَا نَسْمَعُ عَنِ المَشَاكِلِ البِيئِيَّةِ حَتَّى نَشْعُرَ بِأَنَّهُ لَا أَمَلَ، لٰكِنِّي تَعَلَّمْتُ أَنَّ الحُلُولَ الحَقِيقِيَّةَ تَبْدَأُ مِنَ البَيْتِ. فَأُسْرَتِي تَفْرِزُ النُّفَايَاتِ مُنْذُ سَنَتَيْنِ، وَنَحْرِصُ عَلَى إِطْفَاءِ الأَجْهِزَةِ قَبْلَ النَّوْمِ، مِمَّا خَفَّضَ فَاتُورَةَ الكَهْرَبَاءِ بِشَكْلٍ مَلْحُوظٍ.</a:t>
@@ -9372,6 +9438,7 @@
                   <a:srgbClr val="1F2A37"/>
                 </a:solidFill>
                 <a:latin typeface="Amiri" pitchFamily="2" charset="-78"/>
+                <a:ea typeface="Amiri" pitchFamily="2" charset="-78"/>
                 <a:cs typeface="Amiri" pitchFamily="2" charset="-78"/>
               </a:rPr>
               <a:t>أَمَّا فِي المَدْرَسَةِ، فَقَدْ أَسَّسْتُ مَعَ زُمَلَائِي نَادِيًا لِلْبِيئَةِ. وَكَانَ أَوَّلُ مَشَارِيعِنَا جَمْعَ الزُّجَاجَاتِ البْلَاسْتِيكِيَّةِ لِصُنْعِ حَدِيقَةٍ عَمُودِيَّةٍ عَلَى جِدَارِ المَلْعَبِ. فِي البِدَايَةِ لَمْ يَهْتَمَّ أَحَدٌ، لٰكِنَّنَا نَظَّمْنَا مُسَابَقَةً بَيْنَ الصُّفُوفِ، فَجَمَعْنَا أَكْثَرَ مِنْ أَلْفِ زُجَاجَةٍ فِي شَهْرٍ وَاحِدٍ، وَزَرَعْنَا فِيهَا الزُّهُورَ وَالأَعْشَابَ.</a:t>
@@ -9391,6 +9458,7 @@
                   <a:srgbClr val="1F2A37"/>
                 </a:solidFill>
                 <a:latin typeface="Amiri" pitchFamily="2" charset="-78"/>
+                <a:ea typeface="Amiri" pitchFamily="2" charset="-78"/>
                 <a:cs typeface="Amiri" pitchFamily="2" charset="-78"/>
               </a:rPr>
               <a:t>وَمَعَ ذٰلِكَ، أَعْتَقِدُ أَنَّ جُهُودَ الأَفْرَادِ وَحْدَهَا لَا تَكْفِي؛ إِذْ يَجِبُ عَلَى الحُكُومَاتِ أَنْ تَفْرِضَ قَوَانِينَ عَلَى المَصَانِعِ، وَأَنْ تَجْعَلَ المُوَاصَلَاتِ العَامَّةَ أَرْخَصَ لِكَيْ يَتْرُكَ النَّاسُ سَيَّارَاتِهِمْ.</a:t>
@@ -9410,6 +9478,7 @@
                   <a:srgbClr val="1F2A37"/>
                 </a:solidFill>
                 <a:latin typeface="Amiri" pitchFamily="2" charset="-78"/>
+                <a:ea typeface="Amiri" pitchFamily="2" charset="-78"/>
                 <a:cs typeface="Amiri" pitchFamily="2" charset="-78"/>
               </a:rPr>
               <a:t>صَحِيحٌ أَنَّ الطَّرِيقَ طَوِيلٌ، غَيْرَ أَنَّ كُلَّ خُطْوَةٍ صَغِيرَةٍ تُقَرِّبُنَا مِنَ الهَدَفِ. وَلَوْ أَصْبَحَتْ كُلُّ مَدْرَسَةٍ قُدْوَةً كَمَدْرَسَتِنَا، لَنَشَأَ جِيلٌ كَامِلٌ يَحْتَرِمُ الأَرْضَ وَيَحْمِيهَا.</a:t>
@@ -9508,11 +9577,12 @@
               <a:buNone/>
             </a:pPr>
             <a:r>
-              <a:rPr lang="en-US" sz="950" b="1" dirty="0">
+              <a:rPr lang="ar-SA" sz="950" b="1" dirty="0">
                 <a:solidFill>
                   <a:srgbClr val="FFFFFF"/>
                 </a:solidFill>
                 <a:latin typeface="Calibri" pitchFamily="34" charset="0"/>
+                <a:ea typeface="Amiri" pitchFamily="2" charset="-78"/>
                 <a:cs typeface="Amiri" pitchFamily="2" charset="-78"/>
               </a:rPr>
               <a:t>مِمَّا خَفَّضَ</a:t>
@@ -9573,11 +9643,12 @@
               <a:buNone/>
             </a:pPr>
             <a:r>
-              <a:rPr lang="en-US" sz="950" b="1" dirty="0">
+              <a:rPr lang="ar-SA" sz="950" b="1" dirty="0">
                 <a:solidFill>
                   <a:srgbClr val="FFFFFF"/>
                 </a:solidFill>
                 <a:latin typeface="Calibri" pitchFamily="34" charset="0"/>
+                <a:ea typeface="Amiri" pitchFamily="2" charset="-78"/>
                 <a:cs typeface="Amiri" pitchFamily="2" charset="-78"/>
               </a:rPr>
               <a:t>أَمَّا فِي المَدْرَسَةِ، فَقَدْ</a:t>
@@ -9638,11 +9709,12 @@
               <a:buNone/>
             </a:pPr>
             <a:r>
-              <a:rPr lang="en-US" sz="950" b="1" dirty="0">
+              <a:rPr lang="ar-SA" sz="950" b="1" dirty="0">
                 <a:solidFill>
                   <a:srgbClr val="FFFFFF"/>
                 </a:solidFill>
                 <a:latin typeface="Calibri" pitchFamily="34" charset="0"/>
+                <a:ea typeface="Amiri" pitchFamily="2" charset="-78"/>
                 <a:cs typeface="Amiri" pitchFamily="2" charset="-78"/>
               </a:rPr>
               <a:t>يَجِبُ عَلَى الحُكُومَاتِ أَنْ</a:t>
@@ -9703,11 +9775,12 @@
               <a:buNone/>
             </a:pPr>
             <a:r>
-              <a:rPr lang="en-US" sz="950" b="1" dirty="0">
+              <a:rPr lang="ar-SA" sz="950" b="1" dirty="0">
                 <a:solidFill>
                   <a:srgbClr val="FFFFFF"/>
                 </a:solidFill>
                 <a:latin typeface="Calibri" pitchFamily="34" charset="0"/>
+                <a:ea typeface="Amiri" pitchFamily="2" charset="-78"/>
                 <a:cs typeface="Amiri" pitchFamily="2" charset="-78"/>
               </a:rPr>
               <a:t>لَوْ أَصْبَحَتْ … لَنَشَأَ</a:t>
@@ -9841,6 +9914,7 @@
                   <a:srgbClr val="D4AF37"/>
                 </a:solidFill>
                 <a:latin typeface="Amiri" pitchFamily="2" charset="-78"/>
+                <a:ea typeface="Amiri" pitchFamily="2" charset="-78"/>
                 <a:cs typeface="Amiri" pitchFamily="2" charset="-78"/>
               </a:rPr>
               <a:t>م</a:t>
@@ -10098,6 +10172,7 @@
                   <a:srgbClr val="8A6D1E"/>
                 </a:solidFill>
                 <a:latin typeface="Amiri" pitchFamily="2" charset="-78"/>
+                <a:ea typeface="Amiri" pitchFamily="2" charset="-78"/>
                 <a:cs typeface="Amiri" pitchFamily="2" charset="-78"/>
               </a:rPr>
               <a:t>ب</a:t>
@@ -10162,6 +10237,7 @@
                   <a:srgbClr val="1B3B6F"/>
                 </a:solidFill>
                 <a:latin typeface="Amiri" pitchFamily="2" charset="-78"/>
+                <a:ea typeface="Amiri" pitchFamily="2" charset="-78"/>
                 <a:cs typeface="Amiri" pitchFamily="2" charset="-78"/>
               </a:rPr>
               <a:t>ب</a:t>
@@ -10213,6 +10289,7 @@
                   <a:srgbClr val="8A6D1E"/>
                 </a:solidFill>
                 <a:latin typeface="Amiri" pitchFamily="2" charset="-78"/>
+                <a:ea typeface="Amiri" pitchFamily="2" charset="-78"/>
                 <a:cs typeface="Amiri" pitchFamily="2" charset="-78"/>
               </a:rPr>
               <a:t>نَمُوذَجُ الإِجَابَةِ</a:t>
@@ -10326,6 +10403,7 @@
                   <a:srgbClr val="1F2A37"/>
                 </a:solidFill>
                 <a:latin typeface="Amiri" pitchFamily="2" charset="-78"/>
+                <a:ea typeface="Amiri" pitchFamily="2" charset="-78"/>
                 <a:cs typeface="Amiri" pitchFamily="2" charset="-78"/>
               </a:rPr>
               <a:t>عِنْدَمَا نَتَحَدَّثُ عَنْ حِمَايَةِ البِيئَةِ، يُلْقِي كُلُّ طَرَفٍ المَسْؤُولِيَّةَ عَلَى الآخَرِ؛ فَالمُوَاطِنُونَ يَلُومُونَ الحُكُومَاتِ وَالشَّرِكَاتِ الكُبْرَى، وَالحُكُومَاتُ تَطْلُبُ مِنَ المُوَاطِنِينَ أَنْ يُغَيِّرُوا عَادَاتِهِمْ، بَيْنَمَا تَسْتَمِرُّ المُشْكِلَةُ فِي التَّفَاقُمِ يَوْمًا بَعْدَ يَوْمٍ. فَمَنِ المَسْؤُولُ حَقًّا؟</a:t>
@@ -10345,6 +10423,7 @@
                   <a:srgbClr val="1F2A37"/>
                 </a:solidFill>
                 <a:latin typeface="Amiri" pitchFamily="2" charset="-78"/>
+                <a:ea typeface="Amiri" pitchFamily="2" charset="-78"/>
                 <a:cs typeface="Amiri" pitchFamily="2" charset="-78"/>
               </a:rPr>
               <a:t>مِنْ نَاحِيَةٍ، تَمْلِكُ الحُكُومَاتُ القُوَّةَ لِتَغْيِيرِ الوَاقِعِ بِسُرْعَةٍ؛ فَقَانُونٌ وَاحِدٌ يَمْنَعُ الأَكْيَاسَ البْلَاسْتِيكِيَّةَ يُوقِفُ اسْتِخْدَامَ مَلَايِينِ الأَكْيَاسِ. وَمِنْ نَاحِيَةٍ أُخْرَى، لَا يَنْجَحُ أَيُّ قَانُونٍ إِذَا لَمْ يَقْتَنِعْ بِهِ النَّاسُ وَيُطَبِّقُوهُ فِي حَيَاتِهِمُ اليَوْمِيَّةِ.</a:t>
@@ -10364,6 +10443,7 @@
                   <a:srgbClr val="1F2A37"/>
                 </a:solidFill>
                 <a:latin typeface="Amiri" pitchFamily="2" charset="-78"/>
+                <a:ea typeface="Amiri" pitchFamily="2" charset="-78"/>
                 <a:cs typeface="Amiri" pitchFamily="2" charset="-78"/>
               </a:rPr>
               <a:t>وَقَدْ رَأَيْتُ مِثَالًا رَائِعًا عَلَى التَّعَاوُنِ حِينَ زُرْتُ أَقَارِبِي فِي رُوَانْدَا، الَّتِي مَنَعَتِ البْلَاسْتِيكَ مُنْذُ سَنَوَاتٍ؛ فَالشَّوَارِعُ هُنَاكَ نَظِيفَةٌ بِشَكْلٍ مُدْهِشٍ، وَيُشَارِكُ السُّكَّانُ جَمِيعًا فِي يَوْمِ تَنْظِيفٍ شَهْرِيٍّ، حَتَّى الوُزَرَاءُ أَنْفُسُهُمْ. وَقَدْ أَدْهَشَنِي أَنَّ أَحَدًا لَا يَشْكُو، بَلْ يَعْتَبِرُونَهُ وَاجِبًا وَطَنِيًّا.</a:t>
@@ -10383,6 +10463,7 @@
                   <a:srgbClr val="1F2A37"/>
                 </a:solidFill>
                 <a:latin typeface="Amiri" pitchFamily="2" charset="-78"/>
+                <a:ea typeface="Amiri" pitchFamily="2" charset="-78"/>
                 <a:cs typeface="Amiri" pitchFamily="2" charset="-78"/>
               </a:rPr>
               <a:t>لِذٰلِكَ أَرَى أَنَّ المَسْؤُولِيَّةَ مُشْتَرَكَةٌ: يَجِبُ عَلَى الحُكُومَاتِ أَنْ تَضَعَ القَوَانِينَ، وَيَنْبَغِي عَلَيْنَا أَنْ نُغَيِّرَ سُلُوكَنَا. وَإِذَا عَمِلَ الطَّرَفَانِ مَعًا، فَسَنَحْمِي كَوْكَبَنَا لِلْأَجْيَالِ القَادِمَةِ.</a:t>
@@ -10481,11 +10562,12 @@
               <a:buNone/>
             </a:pPr>
             <a:r>
-              <a:rPr lang="en-US" sz="950" b="1" dirty="0">
+              <a:rPr lang="ar-SA" sz="950" b="1" dirty="0">
                 <a:solidFill>
                   <a:srgbClr val="FFFFFF"/>
                 </a:solidFill>
                 <a:latin typeface="Calibri" pitchFamily="34" charset="0"/>
+                <a:ea typeface="Amiri" pitchFamily="2" charset="-78"/>
                 <a:cs typeface="Amiri" pitchFamily="2" charset="-78"/>
               </a:rPr>
               <a:t>يُلْقِي كُلُّ طَرَفٍ</a:t>
@@ -10546,11 +10628,12 @@
               <a:buNone/>
             </a:pPr>
             <a:r>
-              <a:rPr lang="en-US" sz="950" b="1" dirty="0">
+              <a:rPr lang="ar-SA" sz="950" b="1" dirty="0">
                 <a:solidFill>
                   <a:srgbClr val="FFFFFF"/>
                 </a:solidFill>
                 <a:latin typeface="Calibri" pitchFamily="34" charset="0"/>
+                <a:ea typeface="Amiri" pitchFamily="2" charset="-78"/>
                 <a:cs typeface="Amiri" pitchFamily="2" charset="-78"/>
               </a:rPr>
               <a:t>مِنْ نَاحِيَةٍ … وَمِنْ نَاحِيَةٍ أُخْرَى</a:t>
@@ -10611,11 +10694,12 @@
               <a:buNone/>
             </a:pPr>
             <a:r>
-              <a:rPr lang="en-US" sz="950" b="1" dirty="0">
+              <a:rPr lang="ar-SA" sz="950" b="1" dirty="0">
                 <a:solidFill>
                   <a:srgbClr val="FFFFFF"/>
                 </a:solidFill>
                 <a:latin typeface="Calibri" pitchFamily="34" charset="0"/>
+                <a:ea typeface="Amiri" pitchFamily="2" charset="-78"/>
                 <a:cs typeface="Amiri" pitchFamily="2" charset="-78"/>
               </a:rPr>
               <a:t>إِذَا لَمْ يَقْتَنِعْ</a:t>
@@ -10676,11 +10760,12 @@
               <a:buNone/>
             </a:pPr>
             <a:r>
-              <a:rPr lang="en-US" sz="950" b="1" dirty="0">
+              <a:rPr lang="ar-SA" sz="950" b="1" dirty="0">
                 <a:solidFill>
                   <a:srgbClr val="FFFFFF"/>
                 </a:solidFill>
                 <a:latin typeface="Calibri" pitchFamily="34" charset="0"/>
+                <a:ea typeface="Amiri" pitchFamily="2" charset="-78"/>
                 <a:cs typeface="Amiri" pitchFamily="2" charset="-78"/>
               </a:rPr>
               <a:t>إِذَا عَمِلَ … فَسَنَحْمِي</a:t>
@@ -10814,6 +10899,7 @@
                   <a:srgbClr val="D4AF37"/>
                 </a:solidFill>
                 <a:latin typeface="Amiri" pitchFamily="2" charset="-78"/>
+                <a:ea typeface="Amiri" pitchFamily="2" charset="-78"/>
                 <a:cs typeface="Amiri" pitchFamily="2" charset="-78"/>
               </a:rPr>
               <a:t>م</a:t>
@@ -11134,6 +11220,7 @@
                   <a:srgbClr val="8A6D1E"/>
                 </a:solidFill>
                 <a:latin typeface="Amiri" pitchFamily="2" charset="-78"/>
+                <a:ea typeface="Amiri" pitchFamily="2" charset="-78"/>
                 <a:cs typeface="Amiri" pitchFamily="2" charset="-78"/>
               </a:rPr>
               <a:t>قَيِّمْ عَمَلَكَ</a:t>
@@ -12378,6 +12465,7 @@
                   <a:srgbClr val="FFFFFF"/>
                 </a:solidFill>
                 <a:latin typeface="Amiri" pitchFamily="2" charset="-78"/>
+                <a:ea typeface="Amiri" pitchFamily="2" charset="-78"/>
                 <a:cs typeface="Amiri" pitchFamily="2" charset="-78"/>
               </a:rPr>
               <a:t>أَحْسَنْتُمْ! إِلَى اللِّقَاءِ</a:t>
@@ -12530,6 +12618,7 @@
                   <a:srgbClr val="D4AF37"/>
                 </a:solidFill>
                 <a:latin typeface="Amiri" pitchFamily="2" charset="-78"/>
+                <a:ea typeface="Amiri" pitchFamily="2" charset="-78"/>
                 <a:cs typeface="Amiri" pitchFamily="2" charset="-78"/>
               </a:rPr>
               <a:t>وَرْشَةُ التَّدْرِيبِ</a:t>
@@ -12663,6 +12752,7 @@
                   <a:srgbClr val="D4AF37"/>
                 </a:solidFill>
                 <a:latin typeface="Amiri" pitchFamily="2" charset="-78"/>
+                <a:ea typeface="Amiri" pitchFamily="2" charset="-78"/>
                 <a:cs typeface="Amiri" pitchFamily="2" charset="-78"/>
               </a:rPr>
               <a:t>م</a:t>
@@ -12983,6 +13073,7 @@
                   <a:srgbClr val="8A6D1E"/>
                 </a:solidFill>
                 <a:latin typeface="Amiri" pitchFamily="2" charset="-78"/>
+                <a:ea typeface="Amiri" pitchFamily="2" charset="-78"/>
                 <a:cs typeface="Amiri" pitchFamily="2" charset="-78"/>
               </a:rPr>
               <a:t>آدَابُ الصَّفِّ</a:t>
@@ -14514,6 +14605,7 @@
                   <a:srgbClr val="D4AF37"/>
                 </a:solidFill>
                 <a:latin typeface="Amiri" pitchFamily="2" charset="-78"/>
+                <a:ea typeface="Amiri" pitchFamily="2" charset="-78"/>
                 <a:cs typeface="Amiri" pitchFamily="2" charset="-78"/>
               </a:rPr>
               <a:t>م</a:t>
@@ -14834,6 +14926,7 @@
                   <a:srgbClr val="8A6D1E"/>
                 </a:solidFill>
                 <a:latin typeface="Amiri" pitchFamily="2" charset="-78"/>
+                <a:ea typeface="Amiri" pitchFamily="2" charset="-78"/>
                 <a:cs typeface="Amiri" pitchFamily="2" charset="-78"/>
               </a:rPr>
               <a:t>خَرِيطَةُ الوَرْشَةِ</a:t>
@@ -15148,6 +15241,7 @@
                   <a:srgbClr val="1B3B6F"/>
                 </a:solidFill>
                 <a:latin typeface="Amiri" pitchFamily="2" charset="-78"/>
+                <a:ea typeface="Amiri" pitchFamily="2" charset="-78"/>
                 <a:cs typeface="Amiri" pitchFamily="2" charset="-78"/>
               </a:rPr>
               <a:t>كَيْفَ</a:t>
@@ -15424,6 +15518,7 @@
                   <a:srgbClr val="1E6B52"/>
                 </a:solidFill>
                 <a:latin typeface="Amiri" pitchFamily="2" charset="-78"/>
+                <a:ea typeface="Amiri" pitchFamily="2" charset="-78"/>
                 <a:cs typeface="Amiri" pitchFamily="2" charset="-78"/>
               </a:rPr>
               <a:t>الاسْتِمَارَةُ</a:t>
@@ -15700,6 +15795,7 @@
                   <a:srgbClr val="1E6B52"/>
                 </a:solidFill>
                 <a:latin typeface="Amiri" pitchFamily="2" charset="-78"/>
+                <a:ea typeface="Amiri" pitchFamily="2" charset="-78"/>
                 <a:cs typeface="Amiri" pitchFamily="2" charset="-78"/>
               </a:rPr>
               <a:t>الرِّسَالَةُ</a:t>
@@ -15976,6 +16072,7 @@
                   <a:srgbClr val="1E6B52"/>
                 </a:solidFill>
                 <a:latin typeface="Amiri" pitchFamily="2" charset="-78"/>
+                <a:ea typeface="Amiri" pitchFamily="2" charset="-78"/>
                 <a:cs typeface="Amiri" pitchFamily="2" charset="-78"/>
               </a:rPr>
               <a:t>المَقَالُ</a:t>
@@ -16252,6 +16349,7 @@
                   <a:srgbClr val="8A6D1E"/>
                 </a:solidFill>
                 <a:latin typeface="Amiri" pitchFamily="2" charset="-78"/>
+                <a:ea typeface="Amiri" pitchFamily="2" charset="-78"/>
                 <a:cs typeface="Amiri" pitchFamily="2" charset="-78"/>
               </a:rPr>
               <a:t>قَيِّمْ</a:t>
@@ -16495,6 +16593,7 @@
                   <a:srgbClr val="D4AF37"/>
                 </a:solidFill>
                 <a:latin typeface="Amiri" pitchFamily="2" charset="-78"/>
+                <a:ea typeface="Amiri" pitchFamily="2" charset="-78"/>
                 <a:cs typeface="Amiri" pitchFamily="2" charset="-78"/>
               </a:rPr>
               <a:t>م</a:t>
@@ -16815,6 +16914,7 @@
                   <a:srgbClr val="8A6D1E"/>
                 </a:solidFill>
                 <a:latin typeface="Amiri" pitchFamily="2" charset="-78"/>
+                <a:ea typeface="Amiri" pitchFamily="2" charset="-78"/>
                 <a:cs typeface="Amiri" pitchFamily="2" charset="-78"/>
               </a:rPr>
               <a:t>امْتِحَانُ الكِتَابَةِ</a:t>
@@ -17439,6 +17539,7 @@
                   <a:srgbClr val="1B3B6F"/>
                 </a:solidFill>
                 <a:latin typeface="Amiri" pitchFamily="2" charset="-78"/>
+                <a:ea typeface="Amiri" pitchFamily="2" charset="-78"/>
                 <a:cs typeface="Amiri" pitchFamily="2" charset="-78"/>
               </a:rPr>
               <a:t>يَنْبَغِي أَنْ نَضَعَ سَلَّاتٍ لِإِعَادَةِ التَّدْوِيرِ</a:t>
@@ -17538,6 +17639,7 @@
                   <a:srgbClr val="1B3B6F"/>
                 </a:solidFill>
                 <a:latin typeface="Amiri" pitchFamily="2" charset="-78"/>
+                <a:ea typeface="Amiri" pitchFamily="2" charset="-78"/>
                 <a:cs typeface="Amiri" pitchFamily="2" charset="-78"/>
               </a:rPr>
               <a:t>يَجِبُ عَلَى الحُكُومَاتِ أَنْ تَفْرِضَ قَوَانِينَ</a:t>
@@ -17637,6 +17739,7 @@
                   <a:srgbClr val="1B3B6F"/>
                 </a:solidFill>
                 <a:latin typeface="Amiri" pitchFamily="2" charset="-78"/>
+                <a:ea typeface="Amiri" pitchFamily="2" charset="-78"/>
                 <a:cs typeface="Amiri" pitchFamily="2" charset="-78"/>
               </a:rPr>
               <a:t>لِكَيْ يَتْرُكَ النَّاسُ سَيَّارَاتِهِمْ</a:t>
@@ -17808,6 +17911,7 @@
                   <a:srgbClr val="D4AF37"/>
                 </a:solidFill>
                 <a:latin typeface="Amiri" pitchFamily="2" charset="-78"/>
+                <a:ea typeface="Amiri" pitchFamily="2" charset="-78"/>
                 <a:cs typeface="Amiri" pitchFamily="2" charset="-78"/>
               </a:rPr>
               <a:t>م</a:t>
@@ -18128,6 +18232,7 @@
                   <a:srgbClr val="8A6D1E"/>
                 </a:solidFill>
                 <a:latin typeface="Amiri" pitchFamily="2" charset="-78"/>
+                <a:ea typeface="Amiri" pitchFamily="2" charset="-78"/>
                 <a:cs typeface="Amiri" pitchFamily="2" charset="-78"/>
               </a:rPr>
               <a:t>اسْتِمَارَةُ التَّعَهُّدِ الأَخْضَرِ</a:t>
@@ -18484,6 +18589,7 @@
                   <a:srgbClr val="1B3B6F"/>
                 </a:solidFill>
                 <a:latin typeface="Amiri" pitchFamily="2" charset="-78"/>
+                <a:ea typeface="Amiri" pitchFamily="2" charset="-78"/>
                 <a:cs typeface="Amiri" pitchFamily="2" charset="-78"/>
               </a:rPr>
               <a:t>الاسْمُ</a:t>
@@ -18728,6 +18834,7 @@
                   <a:srgbClr val="1B3B6F"/>
                 </a:solidFill>
                 <a:latin typeface="Amiri" pitchFamily="2" charset="-78"/>
+                <a:ea typeface="Amiri" pitchFamily="2" charset="-78"/>
                 <a:cs typeface="Amiri" pitchFamily="2" charset="-78"/>
               </a:rPr>
               <a:t>المَدْرَسَةُ وَالصَّفُّ</a:t>
@@ -18972,6 +19079,7 @@
                   <a:srgbClr val="1B3B6F"/>
                 </a:solidFill>
                 <a:latin typeface="Amiri" pitchFamily="2" charset="-78"/>
+                <a:ea typeface="Amiri" pitchFamily="2" charset="-78"/>
                 <a:cs typeface="Amiri" pitchFamily="2" charset="-78"/>
               </a:rPr>
               <a:t>وَسِيلَةُ الذَّهَابِ إِلَى المَدْرَسَةِ</a:t>
@@ -19216,6 +19324,7 @@
                   <a:srgbClr val="1B3B6F"/>
                 </a:solidFill>
                 <a:latin typeface="Amiri" pitchFamily="2" charset="-78"/>
+                <a:ea typeface="Amiri" pitchFamily="2" charset="-78"/>
                 <a:cs typeface="Amiri" pitchFamily="2" charset="-78"/>
               </a:rPr>
               <a:t>مَا تُعِيدُ تَدْوِيرَهُ</a:t>
@@ -19460,6 +19569,7 @@
                   <a:srgbClr val="1B3B6F"/>
                 </a:solidFill>
                 <a:latin typeface="Amiri" pitchFamily="2" charset="-78"/>
+                <a:ea typeface="Amiri" pitchFamily="2" charset="-78"/>
                 <a:cs typeface="Amiri" pitchFamily="2" charset="-78"/>
               </a:rPr>
               <a:t>كَيْفَ تُوَفِّرُ المَاءَ؟</a:t>
@@ -19704,6 +19814,7 @@
                   <a:srgbClr val="1B3B6F"/>
                 </a:solidFill>
                 <a:latin typeface="Amiri" pitchFamily="2" charset="-78"/>
+                <a:ea typeface="Amiri" pitchFamily="2" charset="-78"/>
                 <a:cs typeface="Amiri" pitchFamily="2" charset="-78"/>
               </a:rPr>
               <a:t>كَيْفَ تُوَفِّرُ الطَّاقَةَ؟</a:t>
@@ -19948,6 +20059,7 @@
                   <a:srgbClr val="1B3B6F"/>
                 </a:solidFill>
                 <a:latin typeface="Amiri" pitchFamily="2" charset="-78"/>
+                <a:ea typeface="Amiri" pitchFamily="2" charset="-78"/>
                 <a:cs typeface="Amiri" pitchFamily="2" charset="-78"/>
               </a:rPr>
               <a:t>تَعَهُّدُكَ لِهٰذَا الشَّهْرِ</a:t>
@@ -20127,6 +20239,7 @@
                   <a:srgbClr val="1B3B6F"/>
                 </a:solidFill>
                 <a:latin typeface="Amiri" pitchFamily="2" charset="-78"/>
+                <a:ea typeface="Amiri" pitchFamily="2" charset="-78"/>
                 <a:cs typeface="Amiri" pitchFamily="2" charset="-78"/>
               </a:rPr>
               <a:t>جُمْلَةٌ: لِمَاذَا هٰذَا التَّعَهُّدُ؟</a:t>
@@ -20336,6 +20449,7 @@
                   <a:srgbClr val="D4AF37"/>
                 </a:solidFill>
                 <a:latin typeface="Amiri" pitchFamily="2" charset="-78"/>
+                <a:ea typeface="Amiri" pitchFamily="2" charset="-78"/>
                 <a:cs typeface="Amiri" pitchFamily="2" charset="-78"/>
               </a:rPr>
               <a:t>م</a:t>
@@ -20656,6 +20770,7 @@
                   <a:srgbClr val="8A6D1E"/>
                 </a:solidFill>
                 <a:latin typeface="Amiri" pitchFamily="2" charset="-78"/>
+                <a:ea typeface="Amiri" pitchFamily="2" charset="-78"/>
                 <a:cs typeface="Amiri" pitchFamily="2" charset="-78"/>
               </a:rPr>
               <a:t>نَمُوذَجُ الإِجَابَةِ</a:t>
@@ -20974,6 +21089,7 @@
                   <a:srgbClr val="1B3B6F"/>
                 </a:solidFill>
                 <a:latin typeface="Amiri" pitchFamily="2" charset="-78"/>
+                <a:ea typeface="Amiri" pitchFamily="2" charset="-78"/>
                 <a:cs typeface="Amiri" pitchFamily="2" charset="-78"/>
               </a:rPr>
               <a:t>آدَمُ يُوسُفُ</a:t>
@@ -21012,6 +21128,7 @@
                   <a:srgbClr val="1B3B6F"/>
                 </a:solidFill>
                 <a:latin typeface="Amiri" pitchFamily="2" charset="-78"/>
+                <a:ea typeface="Amiri" pitchFamily="2" charset="-78"/>
                 <a:cs typeface="Amiri" pitchFamily="2" charset="-78"/>
               </a:rPr>
               <a:t>الاسْمُ</a:t>
@@ -21153,6 +21270,7 @@
                   <a:srgbClr val="1B3B6F"/>
                 </a:solidFill>
                 <a:latin typeface="Amiri" pitchFamily="2" charset="-78"/>
+                <a:ea typeface="Amiri" pitchFamily="2" charset="-78"/>
                 <a:cs typeface="Amiri" pitchFamily="2" charset="-78"/>
               </a:rPr>
               <a:t>مَدْرَسَةُ المَدِينَةِ، الصَّفُّ الحَادِي عَشَرَ</a:t>
@@ -21191,6 +21309,7 @@
                   <a:srgbClr val="1B3B6F"/>
                 </a:solidFill>
                 <a:latin typeface="Amiri" pitchFamily="2" charset="-78"/>
+                <a:ea typeface="Amiri" pitchFamily="2" charset="-78"/>
                 <a:cs typeface="Amiri" pitchFamily="2" charset="-78"/>
               </a:rPr>
               <a:t>المَدْرَسَةُ وَالصَّفُّ</a:t>
@@ -21332,6 +21451,7 @@
                   <a:srgbClr val="1B3B6F"/>
                 </a:solidFill>
                 <a:latin typeface="Amiri" pitchFamily="2" charset="-78"/>
+                <a:ea typeface="Amiri" pitchFamily="2" charset="-78"/>
                 <a:cs typeface="Amiri" pitchFamily="2" charset="-78"/>
               </a:rPr>
               <a:t>بِالحَافِلَةِ</a:t>
@@ -21370,6 +21490,7 @@
                   <a:srgbClr val="1B3B6F"/>
                 </a:solidFill>
                 <a:latin typeface="Amiri" pitchFamily="2" charset="-78"/>
+                <a:ea typeface="Amiri" pitchFamily="2" charset="-78"/>
                 <a:cs typeface="Amiri" pitchFamily="2" charset="-78"/>
               </a:rPr>
               <a:t>وَسِيلَةُ الذَّهَابِ إِلَى المَدْرَسَةِ</a:t>
@@ -21511,6 +21632,7 @@
                   <a:srgbClr val="1B3B6F"/>
                 </a:solidFill>
                 <a:latin typeface="Amiri" pitchFamily="2" charset="-78"/>
+                <a:ea typeface="Amiri" pitchFamily="2" charset="-78"/>
                 <a:cs typeface="Amiri" pitchFamily="2" charset="-78"/>
               </a:rPr>
               <a:t>الوَرَقُ وَالبْلَاسْتِيكُ</a:t>
@@ -21549,6 +21671,7 @@
                   <a:srgbClr val="1B3B6F"/>
                 </a:solidFill>
                 <a:latin typeface="Amiri" pitchFamily="2" charset="-78"/>
+                <a:ea typeface="Amiri" pitchFamily="2" charset="-78"/>
                 <a:cs typeface="Amiri" pitchFamily="2" charset="-78"/>
               </a:rPr>
               <a:t>مَا تُعِيدُ تَدْوِيرَهُ</a:t>
@@ -21690,6 +21813,7 @@
                   <a:srgbClr val="1B3B6F"/>
                 </a:solidFill>
                 <a:latin typeface="Amiri" pitchFamily="2" charset="-78"/>
+                <a:ea typeface="Amiri" pitchFamily="2" charset="-78"/>
                 <a:cs typeface="Amiri" pitchFamily="2" charset="-78"/>
               </a:rPr>
               <a:t>دُشٌّ قَصِيرٌ</a:t>
@@ -21728,6 +21852,7 @@
                   <a:srgbClr val="1B3B6F"/>
                 </a:solidFill>
                 <a:latin typeface="Amiri" pitchFamily="2" charset="-78"/>
+                <a:ea typeface="Amiri" pitchFamily="2" charset="-78"/>
                 <a:cs typeface="Amiri" pitchFamily="2" charset="-78"/>
               </a:rPr>
               <a:t>كَيْفَ تُوَفِّرُ المَاءَ؟</a:t>
@@ -21869,6 +21994,7 @@
                   <a:srgbClr val="1B3B6F"/>
                 </a:solidFill>
                 <a:latin typeface="Amiri" pitchFamily="2" charset="-78"/>
+                <a:ea typeface="Amiri" pitchFamily="2" charset="-78"/>
                 <a:cs typeface="Amiri" pitchFamily="2" charset="-78"/>
               </a:rPr>
               <a:t>أُطْفِئُ الأَضْوَاءَ</a:t>
@@ -21907,6 +22033,7 @@
                   <a:srgbClr val="1B3B6F"/>
                 </a:solidFill>
                 <a:latin typeface="Amiri" pitchFamily="2" charset="-78"/>
+                <a:ea typeface="Amiri" pitchFamily="2" charset="-78"/>
                 <a:cs typeface="Amiri" pitchFamily="2" charset="-78"/>
               </a:rPr>
               <a:t>كَيْفَ تُوَفِّرُ الطَّاقَةَ؟</a:t>
@@ -22048,6 +22175,7 @@
                   <a:srgbClr val="1B3B6F"/>
                 </a:solidFill>
                 <a:latin typeface="Amiri" pitchFamily="2" charset="-78"/>
+                <a:ea typeface="Amiri" pitchFamily="2" charset="-78"/>
                 <a:cs typeface="Amiri" pitchFamily="2" charset="-78"/>
               </a:rPr>
               <a:t>لَا أَكْيَاسَ بْلَاسْتِيكِيَّةً</a:t>
@@ -22086,6 +22214,7 @@
                   <a:srgbClr val="1B3B6F"/>
                 </a:solidFill>
                 <a:latin typeface="Amiri" pitchFamily="2" charset="-78"/>
+                <a:ea typeface="Amiri" pitchFamily="2" charset="-78"/>
                 <a:cs typeface="Amiri" pitchFamily="2" charset="-78"/>
               </a:rPr>
               <a:t>تَعَهُّدُكَ لِهٰذَا الشَّهْرِ</a:t>
@@ -22227,6 +22356,7 @@
                   <a:srgbClr val="1B3B6F"/>
                 </a:solidFill>
                 <a:latin typeface="Amiri" pitchFamily="2" charset="-78"/>
+                <a:ea typeface="Amiri" pitchFamily="2" charset="-78"/>
                 <a:cs typeface="Amiri" pitchFamily="2" charset="-78"/>
               </a:rPr>
               <a:t>أَتَعَهَّدُ بِذٰلِكَ لِكَيْ أُقَلِّلَ النُّفَايَاتِ الَّتِي تَصِلُ إِلَى البَحْرِ.</a:t>
@@ -22265,6 +22395,7 @@
                   <a:srgbClr val="1B3B6F"/>
                 </a:solidFill>
                 <a:latin typeface="Amiri" pitchFamily="2" charset="-78"/>
+                <a:ea typeface="Amiri" pitchFamily="2" charset="-78"/>
                 <a:cs typeface="Amiri" pitchFamily="2" charset="-78"/>
               </a:rPr>
               <a:t>جُمْلَةٌ: لِمَاذَا هٰذَا التَّعَهُّدُ؟</a:t>
@@ -22474,6 +22605,7 @@
                   <a:srgbClr val="D4AF37"/>
                 </a:solidFill>
                 <a:latin typeface="Amiri" pitchFamily="2" charset="-78"/>
+                <a:ea typeface="Amiri" pitchFamily="2" charset="-78"/>
                 <a:cs typeface="Amiri" pitchFamily="2" charset="-78"/>
               </a:rPr>
               <a:t>م</a:t>
@@ -22794,6 +22926,7 @@
                   <a:srgbClr val="8A6D1E"/>
                 </a:solidFill>
                 <a:latin typeface="Amiri" pitchFamily="2" charset="-78"/>
+                <a:ea typeface="Amiri" pitchFamily="2" charset="-78"/>
                 <a:cs typeface="Amiri" pitchFamily="2" charset="-78"/>
               </a:rPr>
               <a:t>رِسَالَةٌ إِلَى مَجَلَّةِ المَدْرَسَةِ</a:t>
@@ -23269,6 +23402,7 @@
                   <a:srgbClr val="1B3B6F"/>
                 </a:solidFill>
                 <a:latin typeface="Amiri" pitchFamily="2" charset="-78"/>
+                <a:ea typeface="Amiri" pitchFamily="2" charset="-78"/>
                 <a:cs typeface="Amiri" pitchFamily="2" charset="-78"/>
               </a:rPr>
               <a:t>أَكْبَرُ مُشْكِلَةٍ فِي مَدْرَسَتِنَا هِيَ …</a:t>
@@ -23345,6 +23479,7 @@
                   <a:srgbClr val="1B3B6F"/>
                 </a:solidFill>
                 <a:latin typeface="Amiri" pitchFamily="2" charset="-78"/>
+                <a:ea typeface="Amiri" pitchFamily="2" charset="-78"/>
                 <a:cs typeface="Amiri" pitchFamily="2" charset="-78"/>
               </a:rPr>
               <a:t>يَنْبَغِي أَنْ … وَيَجِبُ عَلَى … أَنْ …</a:t>
@@ -23421,6 +23556,7 @@
                   <a:srgbClr val="1B3B6F"/>
                 </a:solidFill>
                 <a:latin typeface="Amiri" pitchFamily="2" charset="-78"/>
+                <a:ea typeface="Amiri" pitchFamily="2" charset="-78"/>
                 <a:cs typeface="Amiri" pitchFamily="2" charset="-78"/>
               </a:rPr>
               <a:t>فِي السَّنَةِ المَاضِيَةِ زَرَعْنَا …</a:t>
@@ -23497,6 +23633,7 @@
                   <a:srgbClr val="1B3B6F"/>
                 </a:solidFill>
                 <a:latin typeface="Amiri" pitchFamily="2" charset="-78"/>
+                <a:ea typeface="Amiri" pitchFamily="2" charset="-78"/>
                 <a:cs typeface="Amiri" pitchFamily="2" charset="-78"/>
               </a:rPr>
               <a:t>سَنُنَظِّمُ … لِكَيْ …</a:t>
@@ -23668,6 +23805,7 @@
                   <a:srgbClr val="D4AF37"/>
                 </a:solidFill>
                 <a:latin typeface="Amiri" pitchFamily="2" charset="-78"/>
+                <a:ea typeface="Amiri" pitchFamily="2" charset="-78"/>
                 <a:cs typeface="Amiri" pitchFamily="2" charset="-78"/>
               </a:rPr>
               <a:t>م</a:t>
@@ -23988,6 +24126,7 @@
                   <a:srgbClr val="8A6D1E"/>
                 </a:solidFill>
                 <a:latin typeface="Amiri" pitchFamily="2" charset="-78"/>
+                <a:ea typeface="Amiri" pitchFamily="2" charset="-78"/>
                 <a:cs typeface="Amiri" pitchFamily="2" charset="-78"/>
               </a:rPr>
               <a:t>نَصُّ السُّؤَالِ</a:t>
@@ -24268,6 +24407,7 @@
                   <a:srgbClr val="1B3B6F"/>
                 </a:solidFill>
                 <a:latin typeface="Amiri" pitchFamily="2" charset="-78"/>
+                <a:ea typeface="Amiri" pitchFamily="2" charset="-78"/>
                 <a:cs typeface="Amiri" pitchFamily="2" charset="-78"/>
               </a:rPr>
               <a:t>تَطْلُبُ مَجَلَّةُ المَدْرَسَةِ أَفْكَارًا لِمَدْرَسَةٍ خَضْرَاءَ. اكْتُبْ رِسَالَةً (٨٠–٩٠ كَلِمَةً).</a:t>
@@ -24409,6 +24549,7 @@
                   <a:srgbClr val="1B3B6F"/>
                 </a:solidFill>
                 <a:latin typeface="Amiri" pitchFamily="2" charset="-78"/>
+                <a:ea typeface="Amiri" pitchFamily="2" charset="-78"/>
                 <a:cs typeface="Amiri" pitchFamily="2" charset="-78"/>
               </a:rPr>
               <a:t>مَا أَكْبَرُ مُشْكِلَةٍ بِيئِيَّةٍ فِي مَدْرَسَتِكَ؟</a:t>
@@ -24550,6 +24691,7 @@
                   <a:srgbClr val="1B3B6F"/>
                 </a:solidFill>
                 <a:latin typeface="Amiri" pitchFamily="2" charset="-78"/>
+                <a:ea typeface="Amiri" pitchFamily="2" charset="-78"/>
                 <a:cs typeface="Amiri" pitchFamily="2" charset="-78"/>
               </a:rPr>
               <a:t>مَاذَا يَنْبَغِي أَنْ يَفْعَلَ الطُّلَّابُ وَالمَدْرَسَةُ؟</a:t>
@@ -24691,6 +24833,7 @@
                   <a:srgbClr val="1B3B6F"/>
                 </a:solidFill>
                 <a:latin typeface="Amiri" pitchFamily="2" charset="-78"/>
+                <a:ea typeface="Amiri" pitchFamily="2" charset="-78"/>
                 <a:cs typeface="Amiri" pitchFamily="2" charset="-78"/>
               </a:rPr>
               <a:t>مَاذَا فَعَلَتْ مَدْرَسَتُكَ فِي المَاضِي؟</a:t>
@@ -24832,6 +24975,7 @@
                   <a:srgbClr val="1B3B6F"/>
                 </a:solidFill>
                 <a:latin typeface="Amiri" pitchFamily="2" charset="-78"/>
+                <a:ea typeface="Amiri" pitchFamily="2" charset="-78"/>
                 <a:cs typeface="Amiri" pitchFamily="2" charset="-78"/>
               </a:rPr>
               <a:t>مَاذَا سَتُنَظِّمُ؟ وَلِمَاذَا؟</a:t>
@@ -25041,6 +25185,7 @@
                   <a:srgbClr val="D4AF37"/>
                 </a:solidFill>
                 <a:latin typeface="Amiri" pitchFamily="2" charset="-78"/>
+                <a:ea typeface="Amiri" pitchFamily="2" charset="-78"/>
                 <a:cs typeface="Amiri" pitchFamily="2" charset="-78"/>
               </a:rPr>
               <a:t>م</a:t>
@@ -25361,6 +25506,7 @@
                   <a:srgbClr val="8A6D1E"/>
                 </a:solidFill>
                 <a:latin typeface="Amiri" pitchFamily="2" charset="-78"/>
+                <a:ea typeface="Amiri" pitchFamily="2" charset="-78"/>
                 <a:cs typeface="Amiri" pitchFamily="2" charset="-78"/>
               </a:rPr>
               <a:t>قَوَالِبُ الكِتَابَةِ</a:t>
@@ -25641,6 +25787,7 @@
                   <a:srgbClr val="1B3B6F"/>
                 </a:solidFill>
                 <a:latin typeface="Amiri" pitchFamily="2" charset="-78"/>
+                <a:ea typeface="Amiri" pitchFamily="2" charset="-78"/>
                 <a:cs typeface="Amiri" pitchFamily="2" charset="-78"/>
               </a:rPr>
               <a:t>إِلَى مُحَرِّرِ مَجَلَّةِ المَدْرَسَةِ،</a:t>
@@ -25847,6 +25994,7 @@
                   <a:srgbClr val="1B3B6F"/>
                 </a:solidFill>
                 <a:latin typeface="Amiri" pitchFamily="2" charset="-78"/>
+                <a:ea typeface="Amiri" pitchFamily="2" charset="-78"/>
                 <a:cs typeface="Amiri" pitchFamily="2" charset="-78"/>
               </a:rPr>
               <a:t>أَكْبَرُ مُشْكِلَةٍ فِي مَدْرَسَتِنَا هِيَ ______ .</a:t>
@@ -26053,6 +26201,7 @@
                   <a:srgbClr val="1B3B6F"/>
                 </a:solidFill>
                 <a:latin typeface="Amiri" pitchFamily="2" charset="-78"/>
+                <a:ea typeface="Amiri" pitchFamily="2" charset="-78"/>
                 <a:cs typeface="Amiri" pitchFamily="2" charset="-78"/>
               </a:rPr>
               <a:t>يَنْبَغِي أَنْ ______ ، وَيَجِبُ عَلَى الطُّلَّابِ أَنْ ______ .</a:t>
@@ -26259,6 +26408,7 @@
                   <a:srgbClr val="1B3B6F"/>
                 </a:solidFill>
                 <a:latin typeface="Amiri" pitchFamily="2" charset="-78"/>
+                <a:ea typeface="Amiri" pitchFamily="2" charset="-78"/>
                 <a:cs typeface="Amiri" pitchFamily="2" charset="-78"/>
               </a:rPr>
               <a:t>فِي السَّنَةِ المَاضِيَةِ ______ .</a:t>
@@ -26465,6 +26615,7 @@
                   <a:srgbClr val="1B3B6F"/>
                 </a:solidFill>
                 <a:latin typeface="Amiri" pitchFamily="2" charset="-78"/>
+                <a:ea typeface="Amiri" pitchFamily="2" charset="-78"/>
                 <a:cs typeface="Amiri" pitchFamily="2" charset="-78"/>
               </a:rPr>
               <a:t>سَنُنَظِّمُ ______ ، لِكَيْ ______ .</a:t>
@@ -26671,6 +26822,7 @@
                   <a:srgbClr val="1B3B6F"/>
                 </a:solidFill>
                 <a:latin typeface="Amiri" pitchFamily="2" charset="-78"/>
+                <a:ea typeface="Amiri" pitchFamily="2" charset="-78"/>
                 <a:cs typeface="Amiri" pitchFamily="2" charset="-78"/>
               </a:rPr>
               <a:t>مَعَ الشُّكْرِ، ______</a:t>
@@ -26910,13 +27062,9 @@
     <a:fontScheme name="Office">
       <a:majorFont>
         <a:latin typeface="Calibri Light" panose="020F0302020204030204"/>
-        <a:ea typeface=""/>
-        <a:cs typeface=""/>
-        <a:font script="Jpan" typeface="游ゴシック Light"/>
-        <a:font script="Hang" typeface="맑은 고딕"/>
-        <a:font script="Hans" typeface="等线 Light"/>
-        <a:font script="Hant" typeface="新細明體"/>
-        <a:font script="Arab" typeface="Times New Roman"/>
+        <a:ea typeface="Amiri" pitchFamily="2" charset="-78"/>
+        <a:cs typeface="Amiri" pitchFamily="2" charset="-78"/>
+        <a:font script="Arab" typeface="Amiri"/>
         <a:font script="Hebr" typeface="Times New Roman"/>
         <a:font script="Thai" typeface="Angsana New"/>
         <a:font script="Ethi" typeface="Nyala"/>
@@ -26962,13 +27110,9 @@
       </a:majorFont>
       <a:minorFont>
         <a:latin typeface="Calibri" panose="020F0502020204030204"/>
-        <a:ea typeface=""/>
-        <a:cs typeface=""/>
-        <a:font script="Jpan" typeface="游ゴシック"/>
-        <a:font script="Hang" typeface="맑은 고딕"/>
-        <a:font script="Hans" typeface="等线"/>
-        <a:font script="Hant" typeface="新細明體"/>
-        <a:font script="Arab" typeface="Arial"/>
+        <a:ea typeface="Amiri" pitchFamily="2" charset="-78"/>
+        <a:cs typeface="Amiri" pitchFamily="2" charset="-78"/>
+        <a:font script="Arab" typeface="Amiri"/>
         <a:font script="Hebr" typeface="Arial"/>
         <a:font script="Thai" typeface="Cordia New"/>
         <a:font script="Ethi" typeface="Nyala"/>

--- a/Topic_C/Exam_Practice/TC-L05_Writing_Workshop_Environmental_Solutions.pptx
+++ b/Topic_C/Exam_Practice/TC-L05_Writing_Workshop_Environmental_Solutions.pptx
@@ -3848,7 +3848,7 @@
                 <a:solidFill>
                   <a:srgbClr val="FFFFFF"/>
                 </a:solidFill>
-                <a:latin typeface="Calibri" pitchFamily="34" charset="0"/>
+                <a:latin typeface="Amiri" pitchFamily="2" charset="-78"/>
                 <a:ea typeface="Amiri" pitchFamily="2" charset="-78"/>
                 <a:cs typeface="Amiri" pitchFamily="2" charset="-78"/>
               </a:rPr>
@@ -3914,7 +3914,7 @@
                 <a:solidFill>
                   <a:srgbClr val="FFFFFF"/>
                 </a:solidFill>
-                <a:latin typeface="Calibri" pitchFamily="34" charset="0"/>
+                <a:latin typeface="Amiri" pitchFamily="2" charset="-78"/>
                 <a:ea typeface="Amiri" pitchFamily="2" charset="-78"/>
                 <a:cs typeface="Amiri" pitchFamily="2" charset="-78"/>
               </a:rPr>
@@ -3980,7 +3980,7 @@
                 <a:solidFill>
                   <a:srgbClr val="FFFFFF"/>
                 </a:solidFill>
-                <a:latin typeface="Calibri" pitchFamily="34" charset="0"/>
+                <a:latin typeface="Amiri" pitchFamily="2" charset="-78"/>
                 <a:ea typeface="Amiri" pitchFamily="2" charset="-78"/>
                 <a:cs typeface="Amiri" pitchFamily="2" charset="-78"/>
               </a:rPr>
@@ -4046,7 +4046,7 @@
                 <a:solidFill>
                   <a:srgbClr val="FFFFFF"/>
                 </a:solidFill>
-                <a:latin typeface="Calibri" pitchFamily="34" charset="0"/>
+                <a:latin typeface="Amiri" pitchFamily="2" charset="-78"/>
                 <a:ea typeface="Amiri" pitchFamily="2" charset="-78"/>
                 <a:cs typeface="Amiri" pitchFamily="2" charset="-78"/>
               </a:rPr>
@@ -4844,7 +4844,7 @@
                 <a:solidFill>
                   <a:srgbClr val="FFFFFF"/>
                 </a:solidFill>
-                <a:latin typeface="Calibri" pitchFamily="34" charset="0"/>
+                <a:latin typeface="Amiri" pitchFamily="2" charset="-78"/>
                 <a:ea typeface="Amiri" pitchFamily="2" charset="-78"/>
                 <a:cs typeface="Amiri" pitchFamily="2" charset="-78"/>
               </a:rPr>
@@ -4910,7 +4910,7 @@
                 <a:solidFill>
                   <a:srgbClr val="FFFFFF"/>
                 </a:solidFill>
-                <a:latin typeface="Calibri" pitchFamily="34" charset="0"/>
+                <a:latin typeface="Amiri" pitchFamily="2" charset="-78"/>
                 <a:ea typeface="Amiri" pitchFamily="2" charset="-78"/>
                 <a:cs typeface="Amiri" pitchFamily="2" charset="-78"/>
               </a:rPr>
@@ -4976,7 +4976,7 @@
                 <a:solidFill>
                   <a:srgbClr val="FFFFFF"/>
                 </a:solidFill>
-                <a:latin typeface="Calibri" pitchFamily="34" charset="0"/>
+                <a:latin typeface="Amiri" pitchFamily="2" charset="-78"/>
                 <a:ea typeface="Amiri" pitchFamily="2" charset="-78"/>
                 <a:cs typeface="Amiri" pitchFamily="2" charset="-78"/>
               </a:rPr>
@@ -5042,7 +5042,7 @@
                 <a:solidFill>
                   <a:srgbClr val="FFFFFF"/>
                 </a:solidFill>
-                <a:latin typeface="Calibri" pitchFamily="34" charset="0"/>
+                <a:latin typeface="Amiri" pitchFamily="2" charset="-78"/>
                 <a:ea typeface="Amiri" pitchFamily="2" charset="-78"/>
                 <a:cs typeface="Amiri" pitchFamily="2" charset="-78"/>
               </a:rPr>
@@ -8596,7 +8596,7 @@
                 <a:solidFill>
                   <a:srgbClr val="FFFFFF"/>
                 </a:solidFill>
-                <a:latin typeface="Calibri" pitchFamily="34" charset="0"/>
+                <a:latin typeface="Amiri" pitchFamily="2" charset="-78"/>
                 <a:ea typeface="Amiri" pitchFamily="2" charset="-78"/>
                 <a:cs typeface="Amiri" pitchFamily="2" charset="-78"/>
               </a:rPr>
@@ -8662,7 +8662,7 @@
                 <a:solidFill>
                   <a:srgbClr val="FFFFFF"/>
                 </a:solidFill>
-                <a:latin typeface="Calibri" pitchFamily="34" charset="0"/>
+                <a:latin typeface="Amiri" pitchFamily="2" charset="-78"/>
                 <a:ea typeface="Amiri" pitchFamily="2" charset="-78"/>
                 <a:cs typeface="Amiri" pitchFamily="2" charset="-78"/>
               </a:rPr>
@@ -8728,7 +8728,7 @@
                 <a:solidFill>
                   <a:srgbClr val="FFFFFF"/>
                 </a:solidFill>
-                <a:latin typeface="Calibri" pitchFamily="34" charset="0"/>
+                <a:latin typeface="Amiri" pitchFamily="2" charset="-78"/>
                 <a:ea typeface="Amiri" pitchFamily="2" charset="-78"/>
                 <a:cs typeface="Amiri" pitchFamily="2" charset="-78"/>
               </a:rPr>
@@ -8794,7 +8794,7 @@
                 <a:solidFill>
                   <a:srgbClr val="FFFFFF"/>
                 </a:solidFill>
-                <a:latin typeface="Calibri" pitchFamily="34" charset="0"/>
+                <a:latin typeface="Amiri" pitchFamily="2" charset="-78"/>
                 <a:ea typeface="Amiri" pitchFamily="2" charset="-78"/>
                 <a:cs typeface="Amiri" pitchFamily="2" charset="-78"/>
               </a:rPr>
@@ -9581,7 +9581,7 @@
                 <a:solidFill>
                   <a:srgbClr val="FFFFFF"/>
                 </a:solidFill>
-                <a:latin typeface="Calibri" pitchFamily="34" charset="0"/>
+                <a:latin typeface="Amiri" pitchFamily="2" charset="-78"/>
                 <a:ea typeface="Amiri" pitchFamily="2" charset="-78"/>
                 <a:cs typeface="Amiri" pitchFamily="2" charset="-78"/>
               </a:rPr>
@@ -9647,7 +9647,7 @@
                 <a:solidFill>
                   <a:srgbClr val="FFFFFF"/>
                 </a:solidFill>
-                <a:latin typeface="Calibri" pitchFamily="34" charset="0"/>
+                <a:latin typeface="Amiri" pitchFamily="2" charset="-78"/>
                 <a:ea typeface="Amiri" pitchFamily="2" charset="-78"/>
                 <a:cs typeface="Amiri" pitchFamily="2" charset="-78"/>
               </a:rPr>
@@ -9713,7 +9713,7 @@
                 <a:solidFill>
                   <a:srgbClr val="FFFFFF"/>
                 </a:solidFill>
-                <a:latin typeface="Calibri" pitchFamily="34" charset="0"/>
+                <a:latin typeface="Amiri" pitchFamily="2" charset="-78"/>
                 <a:ea typeface="Amiri" pitchFamily="2" charset="-78"/>
                 <a:cs typeface="Amiri" pitchFamily="2" charset="-78"/>
               </a:rPr>
@@ -9779,7 +9779,7 @@
                 <a:solidFill>
                   <a:srgbClr val="FFFFFF"/>
                 </a:solidFill>
-                <a:latin typeface="Calibri" pitchFamily="34" charset="0"/>
+                <a:latin typeface="Amiri" pitchFamily="2" charset="-78"/>
                 <a:ea typeface="Amiri" pitchFamily="2" charset="-78"/>
                 <a:cs typeface="Amiri" pitchFamily="2" charset="-78"/>
               </a:rPr>
@@ -10566,7 +10566,7 @@
                 <a:solidFill>
                   <a:srgbClr val="FFFFFF"/>
                 </a:solidFill>
-                <a:latin typeface="Calibri" pitchFamily="34" charset="0"/>
+                <a:latin typeface="Amiri" pitchFamily="2" charset="-78"/>
                 <a:ea typeface="Amiri" pitchFamily="2" charset="-78"/>
                 <a:cs typeface="Amiri" pitchFamily="2" charset="-78"/>
               </a:rPr>
@@ -10632,7 +10632,7 @@
                 <a:solidFill>
                   <a:srgbClr val="FFFFFF"/>
                 </a:solidFill>
-                <a:latin typeface="Calibri" pitchFamily="34" charset="0"/>
+                <a:latin typeface="Amiri" pitchFamily="2" charset="-78"/>
                 <a:ea typeface="Amiri" pitchFamily="2" charset="-78"/>
                 <a:cs typeface="Amiri" pitchFamily="2" charset="-78"/>
               </a:rPr>
@@ -10698,7 +10698,7 @@
                 <a:solidFill>
                   <a:srgbClr val="FFFFFF"/>
                 </a:solidFill>
-                <a:latin typeface="Calibri" pitchFamily="34" charset="0"/>
+                <a:latin typeface="Amiri" pitchFamily="2" charset="-78"/>
                 <a:ea typeface="Amiri" pitchFamily="2" charset="-78"/>
                 <a:cs typeface="Amiri" pitchFamily="2" charset="-78"/>
               </a:rPr>
@@ -10764,7 +10764,7 @@
                 <a:solidFill>
                   <a:srgbClr val="FFFFFF"/>
                 </a:solidFill>
-                <a:latin typeface="Calibri" pitchFamily="34" charset="0"/>
+                <a:latin typeface="Amiri" pitchFamily="2" charset="-78"/>
                 <a:ea typeface="Amiri" pitchFamily="2" charset="-78"/>
                 <a:cs typeface="Amiri" pitchFamily="2" charset="-78"/>
               </a:rPr>
